--- a/Flächennutzungstool.pptx
+++ b/Flächennutzungstool.pptx
@@ -7,9 +7,10 @@
   <p:sldIdLst>
     <p:sldId id="256" r:id="rId2"/>
     <p:sldId id="257" r:id="rId3"/>
-    <p:sldId id="258" r:id="rId4"/>
-    <p:sldId id="260" r:id="rId5"/>
-    <p:sldId id="259" r:id="rId6"/>
+    <p:sldId id="261" r:id="rId4"/>
+    <p:sldId id="258" r:id="rId5"/>
+    <p:sldId id="260" r:id="rId6"/>
+    <p:sldId id="259" r:id="rId7"/>
   </p:sldIdLst>
   <p:sldSz cx="12192000" cy="6858000"/>
   <p:notesSz cx="6858000" cy="9144000"/>
@@ -119,7 +120,7 @@
 <file path=ppt/revisionInfo.xml><?xml version="1.0" encoding="utf-8"?>
 <p1510:revInfo xmlns:a="http://schemas.openxmlformats.org/drawingml/2006/main" xmlns:r="http://schemas.openxmlformats.org/officeDocument/2006/relationships" xmlns:p1510="http://schemas.microsoft.com/office/powerpoint/2015/10/main">
   <p1510:revLst>
-    <p1510:client id="{1FD53DA8-15DE-43F9-92FE-3AFA3C7E20B9}" v="1" dt="2026-05-15T08:33:28.410"/>
+    <p1510:client id="{1FD53DA8-15DE-43F9-92FE-3AFA3C7E20B9}" v="7" dt="2026-05-15T08:56:43.641"/>
   </p1510:revLst>
 </p1510:revInfo>
 </file>
@@ -129,18 +130,18 @@
   <pc:docChgLst>
     <pc:chgData name="Anne Richter" userId="41873eed1339ee92" providerId="LiveId" clId="{1FD53DA8-15DE-43F9-92FE-3AFA3C7E20B9}"/>
     <pc:docChg chg="custSel addSld modSld">
-      <pc:chgData name="Anne Richter" userId="41873eed1339ee92" providerId="LiveId" clId="{1FD53DA8-15DE-43F9-92FE-3AFA3C7E20B9}" dt="2026-05-15T08:34:15.094" v="41" actId="26606"/>
+      <pc:chgData name="Anne Richter" userId="41873eed1339ee92" providerId="LiveId" clId="{1FD53DA8-15DE-43F9-92FE-3AFA3C7E20B9}" dt="2026-05-15T08:57:23.070" v="132" actId="20577"/>
       <pc:docMkLst>
         <pc:docMk/>
       </pc:docMkLst>
       <pc:sldChg chg="modSp mod">
-        <pc:chgData name="Anne Richter" userId="41873eed1339ee92" providerId="LiveId" clId="{1FD53DA8-15DE-43F9-92FE-3AFA3C7E20B9}" dt="2026-05-15T08:32:07.579" v="7" actId="20577"/>
+        <pc:chgData name="Anne Richter" userId="41873eed1339ee92" providerId="LiveId" clId="{1FD53DA8-15DE-43F9-92FE-3AFA3C7E20B9}" dt="2026-05-15T08:57:23.070" v="132" actId="20577"/>
         <pc:sldMkLst>
           <pc:docMk/>
           <pc:sldMk cId="2855697172" sldId="258"/>
         </pc:sldMkLst>
         <pc:spChg chg="mod">
-          <ac:chgData name="Anne Richter" userId="41873eed1339ee92" providerId="LiveId" clId="{1FD53DA8-15DE-43F9-92FE-3AFA3C7E20B9}" dt="2026-05-15T08:32:07.579" v="7" actId="20577"/>
+          <ac:chgData name="Anne Richter" userId="41873eed1339ee92" providerId="LiveId" clId="{1FD53DA8-15DE-43F9-92FE-3AFA3C7E20B9}" dt="2026-05-15T08:57:23.070" v="132" actId="20577"/>
           <ac:spMkLst>
             <pc:docMk/>
             <pc:sldMk cId="2855697172" sldId="258"/>
@@ -234,6 +235,45 @@
             <ac:graphicFrameMk id="3" creationId="{561A7BE3-16EF-31B7-E984-E58914F49059}"/>
           </ac:graphicFrameMkLst>
         </pc:graphicFrameChg>
+      </pc:sldChg>
+      <pc:sldChg chg="addSp delSp modSp new mod">
+        <pc:chgData name="Anne Richter" userId="41873eed1339ee92" providerId="LiveId" clId="{1FD53DA8-15DE-43F9-92FE-3AFA3C7E20B9}" dt="2026-05-15T08:56:43.641" v="90" actId="1076"/>
+        <pc:sldMkLst>
+          <pc:docMk/>
+          <pc:sldMk cId="974895102" sldId="261"/>
+        </pc:sldMkLst>
+        <pc:spChg chg="mod">
+          <ac:chgData name="Anne Richter" userId="41873eed1339ee92" providerId="LiveId" clId="{1FD53DA8-15DE-43F9-92FE-3AFA3C7E20B9}" dt="2026-05-15T08:52:07.007" v="84" actId="20577"/>
+          <ac:spMkLst>
+            <pc:docMk/>
+            <pc:sldMk cId="974895102" sldId="261"/>
+            <ac:spMk id="2" creationId="{33EE9331-D72E-2888-9A83-62CC68FAD8B2}"/>
+          </ac:spMkLst>
+        </pc:spChg>
+        <pc:spChg chg="del">
+          <ac:chgData name="Anne Richter" userId="41873eed1339ee92" providerId="LiveId" clId="{1FD53DA8-15DE-43F9-92FE-3AFA3C7E20B9}" dt="2026-05-15T08:52:19.147" v="85"/>
+          <ac:spMkLst>
+            <pc:docMk/>
+            <pc:sldMk cId="974895102" sldId="261"/>
+            <ac:spMk id="3" creationId="{3B474CDE-ABD0-A1BE-1C2D-4A3EB82487DB}"/>
+          </ac:spMkLst>
+        </pc:spChg>
+        <pc:picChg chg="add mod">
+          <ac:chgData name="Anne Richter" userId="41873eed1339ee92" providerId="LiveId" clId="{1FD53DA8-15DE-43F9-92FE-3AFA3C7E20B9}" dt="2026-05-15T08:56:37.083" v="89" actId="1076"/>
+          <ac:picMkLst>
+            <pc:docMk/>
+            <pc:sldMk cId="974895102" sldId="261"/>
+            <ac:picMk id="1026" creationId="{4AD9D29D-D6FA-BB17-936E-3BA62613D007}"/>
+          </ac:picMkLst>
+        </pc:picChg>
+        <pc:picChg chg="add mod">
+          <ac:chgData name="Anne Richter" userId="41873eed1339ee92" providerId="LiveId" clId="{1FD53DA8-15DE-43F9-92FE-3AFA3C7E20B9}" dt="2026-05-15T08:56:43.641" v="90" actId="1076"/>
+          <ac:picMkLst>
+            <pc:docMk/>
+            <pc:sldMk cId="974895102" sldId="261"/>
+            <ac:picMk id="1028" creationId="{E7286339-6A69-17E2-7774-BE1B3F832ED6}"/>
+          </ac:picMkLst>
+        </pc:picChg>
       </pc:sldChg>
     </pc:docChg>
   </pc:docChgLst>
@@ -3885,10 +3925,10 @@
       </p:grpSpPr>
       <p:sp>
         <p:nvSpPr>
-          <p:cNvPr id="2" name="Title 1">
-            <a:extLst>
-              <a:ext uri="{FF2B5EF4-FFF2-40B4-BE49-F238E27FC236}">
-                <a16:creationId xmlns:a16="http://schemas.microsoft.com/office/drawing/2014/main" id="{960F1E7E-D425-EC70-5908-1BE15EA836B0}"/>
+          <p:cNvPr id="2" name="Titel 1">
+            <a:extLst>
+              <a:ext uri="{FF2B5EF4-FFF2-40B4-BE49-F238E27FC236}">
+                <a16:creationId xmlns:a16="http://schemas.microsoft.com/office/drawing/2014/main" id="{33EE9331-D72E-2888-9A83-62CC68FAD8B2}"/>
               </a:ext>
             </a:extLst>
           </p:cNvPr>
@@ -3906,6 +3946,160 @@
           <a:p>
             <a:r>
               <a:rPr lang="de-DE" dirty="0"/>
+              <a:t>Tool Oberfläche – Entwurf aktuell</a:t>
+            </a:r>
+          </a:p>
+        </p:txBody>
+      </p:sp>
+      <p:pic>
+        <p:nvPicPr>
+          <p:cNvPr id="1026" name="Picture 2" descr="Agrarische Flächennutzung">
+            <a:extLst>
+              <a:ext uri="{FF2B5EF4-FFF2-40B4-BE49-F238E27FC236}">
+                <a16:creationId xmlns:a16="http://schemas.microsoft.com/office/drawing/2014/main" id="{4AD9D29D-D6FA-BB17-936E-3BA62613D007}"/>
+              </a:ext>
+            </a:extLst>
+          </p:cNvPr>
+          <p:cNvPicPr>
+            <a:picLocks noGrp="1" noChangeAspect="1" noChangeArrowheads="1"/>
+          </p:cNvPicPr>
+          <p:nvPr>
+            <p:ph idx="1"/>
+          </p:nvPr>
+        </p:nvPicPr>
+        <p:blipFill>
+          <a:blip r:embed="rId2">
+            <a:extLst>
+              <a:ext uri="{28A0092B-C50C-407E-A947-70E740481C1C}">
+                <a14:useLocalDpi xmlns:a14="http://schemas.microsoft.com/office/drawing/2010/main" val="0"/>
+              </a:ext>
+            </a:extLst>
+          </a:blip>
+          <a:srcRect/>
+          <a:stretch>
+            <a:fillRect/>
+          </a:stretch>
+        </p:blipFill>
+        <p:spPr bwMode="auto">
+          <a:xfrm>
+            <a:off x="1233685" y="2016121"/>
+            <a:ext cx="5155964" cy="3658111"/>
+          </a:xfrm>
+          <a:prstGeom prst="rect">
+            <a:avLst/>
+          </a:prstGeom>
+          <a:noFill/>
+          <a:extLst>
+            <a:ext uri="{909E8E84-426E-40DD-AFC4-6F175D3DCCD1}">
+              <a14:hiddenFill xmlns:a14="http://schemas.microsoft.com/office/drawing/2010/main">
+                <a:solidFill>
+                  <a:srgbClr val="FFFFFF"/>
+                </a:solidFill>
+              </a14:hiddenFill>
+            </a:ext>
+          </a:extLst>
+        </p:spPr>
+      </p:pic>
+      <p:pic>
+        <p:nvPicPr>
+          <p:cNvPr id="1028" name="Picture 4" descr="Zwei Windows-Taschenrechner nebeneinander, links mit mehreren dunkelgrünen Buttons inklusive einem großen „Process“-Button, rechts zwei Reihen helloranger „Configuration“-Buttons">
+            <a:extLst>
+              <a:ext uri="{FF2B5EF4-FFF2-40B4-BE49-F238E27FC236}">
+                <a16:creationId xmlns:a16="http://schemas.microsoft.com/office/drawing/2014/main" id="{E7286339-6A69-17E2-7774-BE1B3F832ED6}"/>
+              </a:ext>
+            </a:extLst>
+          </p:cNvPr>
+          <p:cNvPicPr>
+            <a:picLocks noChangeAspect="1" noChangeArrowheads="1"/>
+          </p:cNvPicPr>
+          <p:nvPr/>
+        </p:nvPicPr>
+        <p:blipFill>
+          <a:blip r:embed="rId3">
+            <a:extLst>
+              <a:ext uri="{28A0092B-C50C-407E-A947-70E740481C1C}">
+                <a14:useLocalDpi xmlns:a14="http://schemas.microsoft.com/office/drawing/2010/main" val="0"/>
+              </a:ext>
+            </a:extLst>
+          </a:blip>
+          <a:srcRect/>
+          <a:stretch>
+            <a:fillRect/>
+          </a:stretch>
+        </p:blipFill>
+        <p:spPr bwMode="auto">
+          <a:xfrm>
+            <a:off x="6389649" y="2016121"/>
+            <a:ext cx="5486400" cy="3657600"/>
+          </a:xfrm>
+          <a:prstGeom prst="rect">
+            <a:avLst/>
+          </a:prstGeom>
+          <a:noFill/>
+          <a:extLst>
+            <a:ext uri="{909E8E84-426E-40DD-AFC4-6F175D3DCCD1}">
+              <a14:hiddenFill xmlns:a14="http://schemas.microsoft.com/office/drawing/2010/main">
+                <a:solidFill>
+                  <a:srgbClr val="FFFFFF"/>
+                </a:solidFill>
+              </a14:hiddenFill>
+            </a:ext>
+          </a:extLst>
+        </p:spPr>
+      </p:pic>
+    </p:spTree>
+    <p:extLst>
+      <p:ext uri="{BB962C8B-B14F-4D97-AF65-F5344CB8AC3E}">
+        <p14:creationId xmlns:p14="http://schemas.microsoft.com/office/powerpoint/2010/main" val="974895102"/>
+      </p:ext>
+    </p:extLst>
+  </p:cSld>
+  <p:clrMapOvr>
+    <a:masterClrMapping/>
+  </p:clrMapOvr>
+</p:sld>
+</file>
+
+<file path=ppt/slides/slide4.xml><?xml version="1.0" encoding="utf-8"?>
+<p:sld xmlns:a="http://schemas.openxmlformats.org/drawingml/2006/main" xmlns:r="http://schemas.openxmlformats.org/officeDocument/2006/relationships" xmlns:p="http://schemas.openxmlformats.org/presentationml/2006/main">
+  <p:cSld>
+    <p:spTree>
+      <p:nvGrpSpPr>
+        <p:cNvPr id="1" name=""/>
+        <p:cNvGrpSpPr/>
+        <p:nvPr/>
+      </p:nvGrpSpPr>
+      <p:grpSpPr>
+        <a:xfrm>
+          <a:off x="0" y="0"/>
+          <a:ext cx="0" cy="0"/>
+          <a:chOff x="0" y="0"/>
+          <a:chExt cx="0" cy="0"/>
+        </a:xfrm>
+      </p:grpSpPr>
+      <p:sp>
+        <p:nvSpPr>
+          <p:cNvPr id="2" name="Title 1">
+            <a:extLst>
+              <a:ext uri="{FF2B5EF4-FFF2-40B4-BE49-F238E27FC236}">
+                <a16:creationId xmlns:a16="http://schemas.microsoft.com/office/drawing/2014/main" id="{960F1E7E-D425-EC70-5908-1BE15EA836B0}"/>
+              </a:ext>
+            </a:extLst>
+          </p:cNvPr>
+          <p:cNvSpPr>
+            <a:spLocks noGrp="1"/>
+          </p:cNvSpPr>
+          <p:nvPr>
+            <p:ph type="title"/>
+          </p:nvPr>
+        </p:nvSpPr>
+        <p:spPr/>
+        <p:txBody>
+          <a:bodyPr/>
+          <a:lstStyle/>
+          <a:p>
+            <a:r>
+              <a:rPr lang="de-DE" dirty="0"/>
               <a:t>Verwendete Technologien</a:t>
             </a:r>
             <a:endParaRPr lang="en-GB" dirty="0"/>
@@ -3931,7 +4125,7 @@
         <p:spPr/>
         <p:txBody>
           <a:bodyPr>
-            <a:normAutofit lnSpcReduction="10000"/>
+            <a:normAutofit fontScale="77500" lnSpcReduction="20000"/>
           </a:bodyPr>
           <a:lstStyle/>
           <a:p>
@@ -3984,8 +4178,33 @@
           </a:p>
           <a:p>
             <a:r>
-              <a:rPr lang="de-DE" dirty="0"/>
+              <a:rPr lang="de-DE" dirty="0" err="1"/>
               <a:t>Minio</a:t>
+            </a:r>
+            <a:endParaRPr lang="de-DE" dirty="0"/>
+          </a:p>
+          <a:p>
+            <a:pPr marL="0" indent="0">
+              <a:buNone/>
+            </a:pPr>
+            <a:r>
+              <a:rPr lang="en-GB" dirty="0"/>
+              <a:t>---</a:t>
+            </a:r>
+          </a:p>
+          <a:p>
+            <a:pPr marL="0" indent="0">
+              <a:buNone/>
+            </a:pPr>
+            <a:r>
+              <a:rPr lang="en-GB" dirty="0"/>
+              <a:t>IDE</a:t>
+            </a:r>
+          </a:p>
+          <a:p>
+            <a:r>
+              <a:rPr lang="en-GB"/>
+              <a:t>Visual Studio Code</a:t>
             </a:r>
             <a:endParaRPr lang="en-GB" dirty="0"/>
           </a:p>
@@ -4004,7 +4223,7 @@
 </p:sld>
 </file>
 
-<file path=ppt/slides/slide4.xml><?xml version="1.0" encoding="utf-8"?>
+<file path=ppt/slides/slide5.xml><?xml version="1.0" encoding="utf-8"?>
 <p:sld xmlns:a="http://schemas.openxmlformats.org/drawingml/2006/main" xmlns:r="http://schemas.openxmlformats.org/officeDocument/2006/relationships" xmlns:p="http://schemas.openxmlformats.org/presentationml/2006/main">
   <p:cSld>
     <p:bg>
@@ -5992,7 +6211,7 @@
 </p:sld>
 </file>
 
-<file path=ppt/slides/slide5.xml><?xml version="1.0" encoding="utf-8"?>
+<file path=ppt/slides/slide6.xml><?xml version="1.0" encoding="utf-8"?>
 <p:sld xmlns:a="http://schemas.openxmlformats.org/drawingml/2006/main" xmlns:r="http://schemas.openxmlformats.org/officeDocument/2006/relationships" xmlns:p="http://schemas.openxmlformats.org/presentationml/2006/main">
   <p:cSld>
     <p:spTree>
